--- a/exports/quarto/pptx/09_CrosswalkIndex.pptx
+++ b/exports/quarto/pptx/09_CrosswalkIndex.pptx
@@ -25,6 +25,7 @@
     <p:sldId id="273" r:id="rId19"/>
     <p:sldId id="274" r:id="rId20"/>
     <p:sldId id="275" r:id="rId21"/>
+    <p:sldId id="276" r:id="rId22"/>
   </p:sldIdLst>
   <p:sldSz cx="9144000" cy="5143500" type="screen16x9"/>
   <p:notesSz cx="6858000" cy="9144000"/>
@@ -3191,7 +3192,7 @@
             </a:pPr>
             <a:r>
               <a:rPr/>
-              <a:t>March 31, 2026</a:t>
+              <a:t>April 2, 2026</a:t>
             </a:r>
           </a:p>
         </p:txBody>
@@ -5227,37 +5228,12 @@
       </p:grpSpPr>
       <p:sp>
         <p:nvSpPr>
-          <p:cNvPr id="2" name="Title 1"/>
-          <p:cNvSpPr>
-            <a:spLocks noGrp="1"/>
-          </p:cNvSpPr>
-          <p:nvPr>
-            <p:ph type="title"/>
-          </p:nvPr>
-        </p:nvSpPr>
-        <p:spPr/>
-        <p:txBody>
-          <a:bodyPr/>
-          <a:lstStyle/>
-          <a:p>
-            <a:pPr lvl="0" indent="0" marL="0">
-              <a:buNone/>
-            </a:pPr>
-            <a:r>
-              <a:rPr/>
-              <a:t>9. Dependencies and Sequencing</a:t>
-            </a:r>
-          </a:p>
-        </p:txBody>
-      </p:sp>
-      <p:sp>
-        <p:nvSpPr>
-          <p:cNvPr id="3" name="Content Placeholder 2"/>
-          <p:cNvSpPr>
-            <a:spLocks noGrp="1"/>
-          </p:cNvSpPr>
-          <p:nvPr>
-            <p:ph idx="1"/>
+          <p:cNvPr id="4" name="Text Placeholder 3"/>
+          <p:cNvSpPr>
+            <a:spLocks noGrp="1"/>
+          </p:cNvSpPr>
+          <p:nvPr>
+            <p:ph idx="2" sz="half" type="body"/>
           </p:nvPr>
         </p:nvSpPr>
         <p:spPr/>
@@ -5273,86 +5249,335 @@
             </a:pPr>
             <a:r>
               <a:rPr b="1"/>
-              <a:t>Upstream Dependencies</a:t>
-            </a:r>
-          </a:p>
-          <a:p>
-            <a:pPr lvl="0"/>
-            <a:r>
-              <a:rPr/>
-              <a:t>Identity modernization</a:t>
-            </a:r>
-          </a:p>
-          <a:p>
-            <a:pPr lvl="0"/>
-            <a:r>
-              <a:rPr/>
-              <a:t>IPAM modernization</a:t>
-            </a:r>
-          </a:p>
-          <a:p>
-            <a:pPr lvl="0"/>
-            <a:r>
-              <a:rPr/>
-              <a:t>SD-WAN overlay deployment</a:t>
-            </a:r>
-          </a:p>
-          <a:p>
-            <a:pPr lvl="0" indent="0" marL="0">
-              <a:spcBef>
-                <a:spcPts val="3000"/>
-              </a:spcBef>
-              <a:buNone/>
-            </a:pPr>
-            <a:r>
-              <a:rPr b="1"/>
-              <a:t>Downstream Dependencies</a:t>
-            </a:r>
-          </a:p>
-          <a:p>
-            <a:pPr lvl="0"/>
-            <a:r>
-              <a:rPr/>
-              <a:t>TIC 3.0 packages</a:t>
-            </a:r>
-          </a:p>
-          <a:p>
-            <a:pPr lvl="0"/>
-            <a:r>
-              <a:rPr/>
-              <a:t>FedRAMP 20x evidence generation</a:t>
-            </a:r>
-          </a:p>
-          <a:p>
-            <a:pPr lvl="0"/>
-            <a:r>
-              <a:rPr/>
-              <a:t>Leadership reporting</a:t>
-            </a:r>
-          </a:p>
-          <a:p>
-            <a:pPr lvl="0" indent="0" marL="0">
-              <a:spcBef>
-                <a:spcPts val="3000"/>
-              </a:spcBef>
-              <a:buNone/>
-            </a:pPr>
-            <a:r>
-              <a:rPr b="1"/>
-              <a:t>Timeline Alignment</a:t>
-            </a:r>
-          </a:p>
-          <a:p>
-            <a:pPr lvl="0" indent="0" marL="0">
-              <a:buNone/>
-            </a:pPr>
-            <a:r>
-              <a:rPr/>
-              <a:t>The Crosswalk Index supports all phases of the modernization timeline.</a:t>
-            </a:r>
-          </a:p>
-        </p:txBody>
-      </p:sp>
+              <a:t>8.6 Phase 5 — Data Governance Substrate Crosswalk Index</a:t>
+            </a:r>
+          </a:p>
+        </p:txBody>
+      </p:sp>
+      <p:graphicFrame>
+        <p:nvGraphicFramePr>
+          <p:cNvPr id="6" name="Content Placeholder 5"/>
+          <p:cNvGraphicFramePr>
+            <a:graphicFrameLocks noGrp="1"/>
+          </p:cNvGraphicFramePr>
+          <p:nvPr>
+            <p:ph idx="1"/>
+          </p:nvPr>
+        </p:nvGraphicFramePr>
+        <p:xfrm>
+          <a:off x="3568700" y="203200"/>
+          <a:ext cx="5105400" cy="4381500"/>
+        </p:xfrm>
+        <a:graphic>
+          <a:graphicData uri="http://schemas.openxmlformats.org/drawingml/2006/table">
+            <a:tbl>
+              <a:tblPr firstRow="1" bandRow="1">
+                <a:tableStyleId>{5C22544A-7EE6-4342-B048-85BDC9FD1C3A}</a:tableStyleId>
+              </a:tblPr>
+              <a:tblGrid>
+                <a:gridCol w="1701800"/>
+                <a:gridCol w="1701800"/>
+                <a:gridCol w="1701800"/>
+              </a:tblGrid>
+              <a:tr h="0">
+                <a:tc>
+                  <a:txBody>
+                    <a:bodyPr/>
+                    <a:lstStyle/>
+                    <a:p>
+                      <a:pPr lvl="0" indent="0" marL="0">
+                        <a:buNone/>
+                      </a:pPr>
+                      <a:r>
+                        <a:rPr/>
+                        <a:t>Document</a:t>
+                      </a:r>
+                    </a:p>
+                  </a:txBody>
+                  <a:tcPr/>
+                </a:tc>
+                <a:tc>
+                  <a:txBody>
+                    <a:bodyPr/>
+                    <a:lstStyle/>
+                    <a:p>
+                      <a:pPr lvl="0" indent="0" marL="0">
+                        <a:buNone/>
+                      </a:pPr>
+                      <a:r>
+                        <a:rPr/>
+                        <a:t>Crosswalk Type</a:t>
+                      </a:r>
+                    </a:p>
+                  </a:txBody>
+                  <a:tcPr/>
+                </a:tc>
+                <a:tc>
+                  <a:txBody>
+                    <a:bodyPr/>
+                    <a:lstStyle/>
+                    <a:p>
+                      <a:pPr lvl="0" indent="0" marL="0">
+                        <a:buNone/>
+                      </a:pPr>
+                      <a:r>
+                        <a:rPr/>
+                        <a:t>Reference</a:t>
+                      </a:r>
+                    </a:p>
+                  </a:txBody>
+                  <a:tcPr/>
+                </a:tc>
+              </a:tr>
+              <a:tr h="0">
+                <a:tc>
+                  <a:txBody>
+                    <a:bodyPr/>
+                    <a:lstStyle/>
+                    <a:p>
+                      <a:pPr lvl="0" indent="0" marL="0">
+                        <a:buNone/>
+                      </a:pPr>
+                      <a:r>
+                        <a:rPr>
+                          <a:latin typeface="Courier"/>
+                        </a:rPr>
+                        <a:t>15_ProvenanceProfile.md</a:t>
+                      </a:r>
+                    </a:p>
+                  </a:txBody>
+                </a:tc>
+                <a:tc>
+                  <a:txBody>
+                    <a:bodyPr/>
+                    <a:lstStyle/>
+                    <a:p>
+                      <a:pPr lvl="0" indent="0" marL="0">
+                        <a:buNone/>
+                      </a:pPr>
+                      <a:r>
+                        <a:rPr/>
+                        <a:t>Provenance to NIST AU/SI/AC</a:t>
+                      </a:r>
+                    </a:p>
+                  </a:txBody>
+                </a:tc>
+                <a:tc>
+                  <a:txBody>
+                    <a:bodyPr/>
+                    <a:lstStyle/>
+                    <a:p>
+                      <a:pPr lvl="0" indent="0" marL="0">
+                        <a:buNone/>
+                      </a:pPr>
+                      <a:r>
+                        <a:rPr/>
+                        <a:t>Lineage, audit, integrity</a:t>
+                      </a:r>
+                    </a:p>
+                  </a:txBody>
+                </a:tc>
+              </a:tr>
+              <a:tr h="0">
+                <a:tc>
+                  <a:txBody>
+                    <a:bodyPr/>
+                    <a:lstStyle/>
+                    <a:p>
+                      <a:pPr lvl="0" indent="0" marL="0">
+                        <a:buNone/>
+                      </a:pPr>
+                      <a:r>
+                        <a:rPr>
+                          <a:latin typeface="Courier"/>
+                        </a:rPr>
+                        <a:t>16_DriftDetectionStandard.md</a:t>
+                      </a:r>
+                    </a:p>
+                  </a:txBody>
+                </a:tc>
+                <a:tc>
+                  <a:txBody>
+                    <a:bodyPr/>
+                    <a:lstStyle/>
+                    <a:p>
+                      <a:pPr lvl="0" indent="0" marL="0">
+                        <a:buNone/>
+                      </a:pPr>
+                      <a:r>
+                        <a:rPr/>
+                        <a:t>Drift to NIST CM/SI/CA/IR</a:t>
+                      </a:r>
+                    </a:p>
+                  </a:txBody>
+                </a:tc>
+                <a:tc>
+                  <a:txBody>
+                    <a:bodyPr/>
+                    <a:lstStyle/>
+                    <a:p>
+                      <a:pPr lvl="0" indent="0" marL="0">
+                        <a:buNone/>
+                      </a:pPr>
+                      <a:r>
+                        <a:rPr/>
+                        <a:t>Configuration, monitoring, incident</a:t>
+                      </a:r>
+                    </a:p>
+                  </a:txBody>
+                </a:tc>
+              </a:tr>
+              <a:tr h="0">
+                <a:tc>
+                  <a:txBody>
+                    <a:bodyPr/>
+                    <a:lstStyle/>
+                    <a:p>
+                      <a:pPr lvl="0" indent="0" marL="0">
+                        <a:buNone/>
+                      </a:pPr>
+                      <a:r>
+                        <a:rPr>
+                          <a:latin typeface="Courier"/>
+                        </a:rPr>
+                        <a:t>17_ConsentEnvelope.md</a:t>
+                      </a:r>
+                    </a:p>
+                  </a:txBody>
+                </a:tc>
+                <a:tc>
+                  <a:txBody>
+                    <a:bodyPr/>
+                    <a:lstStyle/>
+                    <a:p>
+                      <a:pPr lvl="0" indent="0" marL="0">
+                        <a:buNone/>
+                      </a:pPr>
+                      <a:r>
+                        <a:rPr/>
+                        <a:t>Consent to NIST AC/AR/IP</a:t>
+                      </a:r>
+                    </a:p>
+                  </a:txBody>
+                </a:tc>
+                <a:tc>
+                  <a:txBody>
+                    <a:bodyPr/>
+                    <a:lstStyle/>
+                    <a:p>
+                      <a:pPr lvl="0" indent="0" marL="0">
+                        <a:buNone/>
+                      </a:pPr>
+                      <a:r>
+                        <a:rPr/>
+                        <a:t>Information flow, privacy</a:t>
+                      </a:r>
+                    </a:p>
+                  </a:txBody>
+                </a:tc>
+              </a:tr>
+              <a:tr h="0">
+                <a:tc>
+                  <a:txBody>
+                    <a:bodyPr/>
+                    <a:lstStyle/>
+                    <a:p>
+                      <a:pPr lvl="0" indent="0" marL="0">
+                        <a:buNone/>
+                      </a:pPr>
+                      <a:r>
+                        <a:rPr>
+                          <a:latin typeface="Courier"/>
+                        </a:rPr>
+                        <a:t>18_ClaimCatalog.md</a:t>
+                      </a:r>
+                    </a:p>
+                  </a:txBody>
+                </a:tc>
+                <a:tc>
+                  <a:txBody>
+                    <a:bodyPr/>
+                    <a:lstStyle/>
+                    <a:p>
+                      <a:pPr lvl="0" indent="0" marL="0">
+                        <a:buNone/>
+                      </a:pPr>
+                      <a:r>
+                        <a:rPr/>
+                        <a:t>Claims to NIST CM/SA/SI</a:t>
+                      </a:r>
+                    </a:p>
+                  </a:txBody>
+                </a:tc>
+                <a:tc>
+                  <a:txBody>
+                    <a:bodyPr/>
+                    <a:lstStyle/>
+                    <a:p>
+                      <a:pPr lvl="0" indent="0" marL="0">
+                        <a:buNone/>
+                      </a:pPr>
+                      <a:r>
+                        <a:rPr/>
+                        <a:t>Inventory, acquisition, retention</a:t>
+                      </a:r>
+                    </a:p>
+                  </a:txBody>
+                </a:tc>
+              </a:tr>
+              <a:tr h="0">
+                <a:tc>
+                  <a:txBody>
+                    <a:bodyPr/>
+                    <a:lstStyle/>
+                    <a:p>
+                      <a:pPr lvl="0" indent="0" marL="0">
+                        <a:buNone/>
+                      </a:pPr>
+                      <a:r>
+                        <a:rPr>
+                          <a:latin typeface="Courier"/>
+                        </a:rPr>
+                        <a:t>19_ReconciliationModel.md</a:t>
+                      </a:r>
+                    </a:p>
+                  </a:txBody>
+                </a:tc>
+                <a:tc>
+                  <a:txBody>
+                    <a:bodyPr/>
+                    <a:lstStyle/>
+                    <a:p>
+                      <a:pPr lvl="0" indent="0" marL="0">
+                        <a:buNone/>
+                      </a:pPr>
+                      <a:r>
+                        <a:rPr/>
+                        <a:t>Reconciliation to NIST AU/IR/SA/PM</a:t>
+                      </a:r>
+                    </a:p>
+                  </a:txBody>
+                </a:tc>
+                <a:tc>
+                  <a:txBody>
+                    <a:bodyPr/>
+                    <a:lstStyle/>
+                    <a:p>
+                      <a:pPr lvl="0" indent="0" marL="0">
+                        <a:buNone/>
+                      </a:pPr>
+                      <a:r>
+                        <a:rPr/>
+                        <a:t>Audit, incident, external services</a:t>
+                      </a:r>
+                    </a:p>
+                  </a:txBody>
+                </a:tc>
+              </a:tr>
+            </a:tbl>
+          </a:graphicData>
+        </a:graphic>
+      </p:graphicFrame>
     </p:spTree>
   </p:cSld>
 </p:sld>
@@ -5395,7 +5620,7 @@
             </a:pPr>
             <a:r>
               <a:rPr/>
-              <a:t>10. Governance and Drift Controls</a:t>
+              <a:t>9. Dependencies and Sequencing</a:t>
             </a:r>
           </a:p>
         </p:txBody>
@@ -5423,35 +5648,28 @@
             </a:pPr>
             <a:r>
               <a:rPr b="1"/>
-              <a:t>Source of Authority</a:t>
+              <a:t>Upstream Dependencies</a:t>
             </a:r>
           </a:p>
           <a:p>
             <a:pPr lvl="0"/>
             <a:r>
               <a:rPr/>
-              <a:t>HR — identity lifecycle</a:t>
+              <a:t>Identity modernization</a:t>
             </a:r>
           </a:p>
           <a:p>
             <a:pPr lvl="0"/>
             <a:r>
               <a:rPr/>
-              <a:t>Network architecture — addressing</a:t>
+              <a:t>IPAM modernization</a:t>
             </a:r>
           </a:p>
           <a:p>
             <a:pPr lvl="0"/>
             <a:r>
               <a:rPr/>
-              <a:t>PKI — certificate trust</a:t>
-            </a:r>
-          </a:p>
-          <a:p>
-            <a:pPr lvl="0"/>
-            <a:r>
-              <a:rPr/>
-              <a:t>System owners — configuration baselines</a:t>
+              <a:t>SD-WAN overlay deployment</a:t>
             </a:r>
           </a:p>
           <a:p>
@@ -5463,35 +5681,28 @@
             </a:pPr>
             <a:r>
               <a:rPr b="1"/>
-              <a:t>Drift Detection</a:t>
+              <a:t>Downstream Dependencies</a:t>
             </a:r>
           </a:p>
           <a:p>
             <a:pPr lvl="0"/>
             <a:r>
               <a:rPr/>
-              <a:t>CMDB reconciliation</a:t>
+              <a:t>TIC 3.0 packages</a:t>
             </a:r>
           </a:p>
           <a:p>
             <a:pPr lvl="0"/>
             <a:r>
               <a:rPr/>
-              <a:t>Intune compliance</a:t>
+              <a:t>FedRAMP 20x evidence generation</a:t>
             </a:r>
           </a:p>
           <a:p>
             <a:pPr lvl="0"/>
             <a:r>
               <a:rPr/>
-              <a:t>SD-WAN overlay validation</a:t>
-            </a:r>
-          </a:p>
-          <a:p>
-            <a:pPr lvl="0"/>
-            <a:r>
-              <a:rPr/>
-              <a:t>IPAM reconciliation</a:t>
+              <a:t>Leadership reporting</a:t>
             </a:r>
           </a:p>
           <a:p>
@@ -5503,35 +5714,16 @@
             </a:pPr>
             <a:r>
               <a:rPr b="1"/>
-              <a:t>Remediation Workflow</a:t>
-            </a:r>
-          </a:p>
-          <a:p>
-            <a:pPr lvl="0"/>
+              <a:t>Timeline Alignment</a:t>
+            </a:r>
+          </a:p>
+          <a:p>
+            <a:pPr lvl="0" indent="0" marL="0">
+              <a:buNone/>
+            </a:pPr>
             <a:r>
               <a:rPr/>
-              <a:t>Automated ServiceNow change</a:t>
-            </a:r>
-          </a:p>
-          <a:p>
-            <a:pPr lvl="0"/>
-            <a:r>
-              <a:rPr/>
-              <a:t>Conditional Access enforcement</a:t>
-            </a:r>
-          </a:p>
-          <a:p>
-            <a:pPr lvl="0"/>
-            <a:r>
-              <a:rPr/>
-              <a:t>Certificate renewal</a:t>
-            </a:r>
-          </a:p>
-          <a:p>
-            <a:pPr lvl="0"/>
-            <a:r>
-              <a:rPr/>
-              <a:t>IPAM correction</a:t>
+              <a:t>The Crosswalk Index supports all phases of the modernization timeline.</a:t>
             </a:r>
           </a:p>
         </p:txBody>
@@ -5578,7 +5770,7 @@
             </a:pPr>
             <a:r>
               <a:rPr/>
-              <a:t>11. Appendices</a:t>
+              <a:t>10. Governance and Drift Controls</a:t>
             </a:r>
           </a:p>
         </p:txBody>
@@ -5606,22 +5798,35 @@
             </a:pPr>
             <a:r>
               <a:rPr b="1"/>
-              <a:t>Appendix A: Definitions</a:t>
-            </a:r>
-          </a:p>
-          <a:p>
-            <a:pPr lvl="0" indent="0" marL="0">
-              <a:buNone/>
-            </a:pPr>
-            <a:r>
-              <a:rPr i="1"/>
-              <a:t>See </a:t>
-            </a:r>
-            <a:r>
-              <a:rPr i="1">
-                <a:latin typeface="Courier"/>
-              </a:rPr>
-              <a:t>docs/glossary.md</a:t>
+              <a:t>Source of Authority</a:t>
+            </a:r>
+          </a:p>
+          <a:p>
+            <a:pPr lvl="0"/>
+            <a:r>
+              <a:rPr/>
+              <a:t>HR — identity lifecycle</a:t>
+            </a:r>
+          </a:p>
+          <a:p>
+            <a:pPr lvl="0"/>
+            <a:r>
+              <a:rPr/>
+              <a:t>Network architecture — addressing</a:t>
+            </a:r>
+          </a:p>
+          <a:p>
+            <a:pPr lvl="0"/>
+            <a:r>
+              <a:rPr/>
+              <a:t>PKI — certificate trust</a:t>
+            </a:r>
+          </a:p>
+          <a:p>
+            <a:pPr lvl="0"/>
+            <a:r>
+              <a:rPr/>
+              <a:t>System owners — configuration baselines</a:t>
             </a:r>
           </a:p>
           <a:p>
@@ -5633,16 +5838,35 @@
             </a:pPr>
             <a:r>
               <a:rPr b="1"/>
-              <a:t>Appendix B: Tables</a:t>
-            </a:r>
-          </a:p>
-          <a:p>
-            <a:pPr lvl="0" indent="0" marL="0">
-              <a:buNone/>
-            </a:pPr>
-            <a:r>
-              <a:rPr i="1"/>
-              <a:t>Crosswalk master tables are in Section 8. Control Plane Alignment table is in Section 4.</a:t>
+              <a:t>Drift Detection</a:t>
+            </a:r>
+          </a:p>
+          <a:p>
+            <a:pPr lvl="0"/>
+            <a:r>
+              <a:rPr/>
+              <a:t>CMDB reconciliation</a:t>
+            </a:r>
+          </a:p>
+          <a:p>
+            <a:pPr lvl="0"/>
+            <a:r>
+              <a:rPr/>
+              <a:t>Intune compliance</a:t>
+            </a:r>
+          </a:p>
+          <a:p>
+            <a:pPr lvl="0"/>
+            <a:r>
+              <a:rPr/>
+              <a:t>SD-WAN overlay validation</a:t>
+            </a:r>
+          </a:p>
+          <a:p>
+            <a:pPr lvl="0"/>
+            <a:r>
+              <a:rPr/>
+              <a:t>IPAM reconciliation</a:t>
             </a:r>
           </a:p>
           <a:p>
@@ -5654,57 +5878,35 @@
             </a:pPr>
             <a:r>
               <a:rPr b="1"/>
-              <a:t>Appendix C: Evidence Sources</a:t>
-            </a:r>
-          </a:p>
-          <a:p>
-            <a:pPr lvl="0" indent="0" marL="0">
-              <a:buNone/>
-            </a:pPr>
-            <a:r>
-              <a:rPr i="1"/>
-              <a:t>See </a:t>
-            </a:r>
-            <a:r>
-              <a:rPr i="1">
-                <a:latin typeface="Courier"/>
-              </a:rPr>
-              <a:t>data/parameters.yml</a:t>
-            </a:r>
-            <a:r>
-              <a:rPr i="1"/>
-              <a:t> and control-library entries for evidence source catalogs.</a:t>
-            </a:r>
-          </a:p>
-          <a:p>
-            <a:pPr lvl="0" indent="0" marL="0">
-              <a:spcBef>
-                <a:spcPts val="3000"/>
-              </a:spcBef>
-              <a:buNone/>
-            </a:pPr>
-            <a:r>
-              <a:rPr b="1"/>
-              <a:t>Appendix D: Crosswalk References</a:t>
-            </a:r>
-          </a:p>
-          <a:p>
-            <a:pPr lvl="0" indent="0" marL="0">
-              <a:buNone/>
-            </a:pPr>
-            <a:r>
-              <a:rPr i="1"/>
-              <a:t>See </a:t>
-            </a:r>
-            <a:r>
-              <a:rPr i="1">
-                <a:latin typeface="Courier"/>
-              </a:rPr>
-              <a:t>data/crosswalk-index.yml</a:t>
-            </a:r>
-            <a:r>
-              <a:rPr i="1"/>
-              <a:t> for machine-readable crosswalk data.</a:t>
+              <a:t>Remediation Workflow</a:t>
+            </a:r>
+          </a:p>
+          <a:p>
+            <a:pPr lvl="0"/>
+            <a:r>
+              <a:rPr/>
+              <a:t>Automated ServiceNow change</a:t>
+            </a:r>
+          </a:p>
+          <a:p>
+            <a:pPr lvl="0"/>
+            <a:r>
+              <a:rPr/>
+              <a:t>Conditional Access enforcement</a:t>
+            </a:r>
+          </a:p>
+          <a:p>
+            <a:pPr lvl="0"/>
+            <a:r>
+              <a:rPr/>
+              <a:t>Certificate renewal</a:t>
+            </a:r>
+          </a:p>
+          <a:p>
+            <a:pPr lvl="0"/>
+            <a:r>
+              <a:rPr/>
+              <a:t>IPAM correction</a:t>
             </a:r>
           </a:p>
         </p:txBody>
@@ -5803,6 +6005,179 @@
             </a:pPr>
             <a:r>
               <a:rPr/>
+              <a:t>11. Appendices</a:t>
+            </a:r>
+          </a:p>
+        </p:txBody>
+      </p:sp>
+      <p:sp>
+        <p:nvSpPr>
+          <p:cNvPr id="3" name="Content Placeholder 2"/>
+          <p:cNvSpPr>
+            <a:spLocks noGrp="1"/>
+          </p:cNvSpPr>
+          <p:nvPr>
+            <p:ph idx="1"/>
+          </p:nvPr>
+        </p:nvSpPr>
+        <p:spPr/>
+        <p:txBody>
+          <a:bodyPr/>
+          <a:lstStyle/>
+          <a:p>
+            <a:pPr lvl="0" indent="0" marL="0">
+              <a:spcBef>
+                <a:spcPts val="3000"/>
+              </a:spcBef>
+              <a:buNone/>
+            </a:pPr>
+            <a:r>
+              <a:rPr b="1"/>
+              <a:t>Appendix A: Definitions</a:t>
+            </a:r>
+          </a:p>
+          <a:p>
+            <a:pPr lvl="0" indent="0" marL="0">
+              <a:buNone/>
+            </a:pPr>
+            <a:r>
+              <a:rPr i="1"/>
+              <a:t>See </a:t>
+            </a:r>
+            <a:r>
+              <a:rPr i="1">
+                <a:latin typeface="Courier"/>
+              </a:rPr>
+              <a:t>docs/glossary.md</a:t>
+            </a:r>
+          </a:p>
+          <a:p>
+            <a:pPr lvl="0" indent="0" marL="0">
+              <a:spcBef>
+                <a:spcPts val="3000"/>
+              </a:spcBef>
+              <a:buNone/>
+            </a:pPr>
+            <a:r>
+              <a:rPr b="1"/>
+              <a:t>Appendix B: Tables</a:t>
+            </a:r>
+          </a:p>
+          <a:p>
+            <a:pPr lvl="0" indent="0" marL="0">
+              <a:buNone/>
+            </a:pPr>
+            <a:r>
+              <a:rPr i="1"/>
+              <a:t>Crosswalk master tables are in Section 8. Control Plane Alignment table is in Section 4.</a:t>
+            </a:r>
+          </a:p>
+          <a:p>
+            <a:pPr lvl="0" indent="0" marL="0">
+              <a:spcBef>
+                <a:spcPts val="3000"/>
+              </a:spcBef>
+              <a:buNone/>
+            </a:pPr>
+            <a:r>
+              <a:rPr b="1"/>
+              <a:t>Appendix C: Evidence Sources</a:t>
+            </a:r>
+          </a:p>
+          <a:p>
+            <a:pPr lvl="0" indent="0" marL="0">
+              <a:buNone/>
+            </a:pPr>
+            <a:r>
+              <a:rPr i="1"/>
+              <a:t>See </a:t>
+            </a:r>
+            <a:r>
+              <a:rPr i="1">
+                <a:latin typeface="Courier"/>
+              </a:rPr>
+              <a:t>data/parameters.yml</a:t>
+            </a:r>
+            <a:r>
+              <a:rPr i="1"/>
+              <a:t> and control-library entries for evidence source catalogs.</a:t>
+            </a:r>
+          </a:p>
+          <a:p>
+            <a:pPr lvl="0" indent="0" marL="0">
+              <a:spcBef>
+                <a:spcPts val="3000"/>
+              </a:spcBef>
+              <a:buNone/>
+            </a:pPr>
+            <a:r>
+              <a:rPr b="1"/>
+              <a:t>Appendix D: Crosswalk References</a:t>
+            </a:r>
+          </a:p>
+          <a:p>
+            <a:pPr lvl="0" indent="0" marL="0">
+              <a:buNone/>
+            </a:pPr>
+            <a:r>
+              <a:rPr i="1"/>
+              <a:t>See </a:t>
+            </a:r>
+            <a:r>
+              <a:rPr i="1">
+                <a:latin typeface="Courier"/>
+              </a:rPr>
+              <a:t>data/crosswalk-index.yml</a:t>
+            </a:r>
+            <a:r>
+              <a:rPr i="1"/>
+              <a:t> for machine-readable crosswalk data.</a:t>
+            </a:r>
+          </a:p>
+        </p:txBody>
+      </p:sp>
+    </p:spTree>
+  </p:cSld>
+</p:sld>
+</file>
+
+<file path=ppt/slides/slide21.xml><?xml version="1.0" encoding="utf-8"?>
+<p:sld xmlns:a="http://schemas.openxmlformats.org/drawingml/2006/main" xmlns:r="http://schemas.openxmlformats.org/officeDocument/2006/relationships" xmlns:p="http://schemas.openxmlformats.org/presentationml/2006/main">
+  <p:cSld>
+    <p:spTree>
+      <p:nvGrpSpPr>
+        <p:cNvPr id="1" name=""/>
+        <p:cNvGrpSpPr/>
+        <p:nvPr/>
+      </p:nvGrpSpPr>
+      <p:grpSpPr>
+        <a:xfrm>
+          <a:off x="0" y="0"/>
+          <a:ext cx="0" cy="0"/>
+          <a:chOff x="0" y="0"/>
+          <a:chExt cx="0" cy="0"/>
+        </a:xfrm>
+      </p:grpSpPr>
+      <p:sp>
+        <p:nvSpPr>
+          <p:cNvPr id="2" name="Title 1"/>
+          <p:cNvSpPr>
+            <a:spLocks noGrp="1"/>
+          </p:cNvSpPr>
+          <p:nvPr>
+            <p:ph type="title"/>
+          </p:nvPr>
+        </p:nvSpPr>
+        <p:spPr/>
+        <p:txBody>
+          <a:bodyPr/>
+          <a:lstStyle/>
+          <a:p>
+            <a:pPr lvl="0" indent="0" marL="0">
+              <a:buNone/>
+            </a:pPr>
+            <a:r>
+              <a:rPr/>
               <a:t>12. Revision History</a:t>
             </a:r>
           </a:p>
@@ -5957,6 +6332,68 @@
                       <a:r>
                         <a:rPr/>
                         <a:t>Initial canonical release</a:t>
+                      </a:r>
+                    </a:p>
+                  </a:txBody>
+                </a:tc>
+              </a:tr>
+              <a:tr h="0">
+                <a:tc>
+                  <a:txBody>
+                    <a:bodyPr/>
+                    <a:lstStyle/>
+                    <a:p>
+                      <a:pPr lvl="0" indent="0" marL="0">
+                        <a:buNone/>
+                      </a:pPr>
+                      <a:r>
+                        <a:rPr/>
+                        <a:t>1.1</a:t>
+                      </a:r>
+                    </a:p>
+                  </a:txBody>
+                </a:tc>
+                <a:tc>
+                  <a:txBody>
+                    <a:bodyPr/>
+                    <a:lstStyle/>
+                    <a:p>
+                      <a:pPr lvl="0" indent="0" marL="0">
+                        <a:buNone/>
+                      </a:pPr>
+                      <a:r>
+                        <a:rPr/>
+                        <a:t>2026-04</a:t>
+                      </a:r>
+                    </a:p>
+                  </a:txBody>
+                </a:tc>
+                <a:tc>
+                  <a:txBody>
+                    <a:bodyPr/>
+                    <a:lstStyle/>
+                    <a:p>
+                      <a:pPr lvl="0" indent="0" marL="0">
+                        <a:buNone/>
+                      </a:pPr>
+                      <a:r>
+                        <a:rPr/>
+                        <a:t>UIAO Canon Engine</a:t>
+                      </a:r>
+                    </a:p>
+                  </a:txBody>
+                </a:tc>
+                <a:tc>
+                  <a:txBody>
+                    <a:bodyPr/>
+                    <a:lstStyle/>
+                    <a:p>
+                      <a:pPr lvl="0" indent="0" marL="0">
+                        <a:buNone/>
+                      </a:pPr>
+                      <a:r>
+                        <a:rPr/>
+                        <a:t>Register Phase 5 docs 15–19; add Section 8.6</a:t>
                       </a:r>
                     </a:p>
                   </a:txBody>
@@ -6905,7 +7342,20 @@
             </a:pPr>
             <a:r>
               <a:rPr/>
-              <a:t>The Crosswalk Index is governed by the Seven Core Concepts:</a:t>
+              <a:t>The Crosswalk Index is governed by the Eight Core Concepts:</a:t>
+            </a:r>
+          </a:p>
+          <a:p>
+            <a:pPr lvl="0" indent="-342900" marL="342900">
+              <a:buAutoNum type="arabicPeriod"/>
+            </a:pPr>
+            <a:r>
+              <a:rPr b="1"/>
+              <a:t>Single Source of Truth (SSOT)</a:t>
+            </a:r>
+            <a:r>
+              <a:rPr/>
+              <a:t> — UIAO operates on the principle that every claim has one authoritative origin. All other representations are pointers, not copies. This ensures provenance, prevents drift, and enables federated truth resolution across boundaries.</a:t>
             </a:r>
           </a:p>
           <a:p>
@@ -7491,6 +7941,251 @@
                       <a:r>
                         <a:rPr/>
                         <a:t>Doctrinal mapping</a:t>
+                      </a:r>
+                    </a:p>
+                  </a:txBody>
+                </a:tc>
+              </a:tr>
+              <a:tr h="0">
+                <a:tc>
+                  <a:txBody>
+                    <a:bodyPr/>
+                    <a:lstStyle/>
+                    <a:p>
+                      <a:pPr lvl="0" indent="0" marL="0">
+                        <a:buNone/>
+                      </a:pPr>
+                      <a:r>
+                        <a:rPr>
+                          <a:latin typeface="Courier"/>
+                        </a:rPr>
+                        <a:t>15_ProvenanceProfile.md</a:t>
+                      </a:r>
+                    </a:p>
+                  </a:txBody>
+                </a:tc>
+                <a:tc>
+                  <a:txBody>
+                    <a:bodyPr/>
+                    <a:lstStyle/>
+                    <a:p>
+                      <a:pPr lvl="0" indent="0" marL="0">
+                        <a:buNone/>
+                      </a:pPr>
+                      <a:r>
+                        <a:rPr/>
+                        <a:t>Provenance to AU-3/AU-9/SI-7/AC-4</a:t>
+                      </a:r>
+                    </a:p>
+                  </a:txBody>
+                </a:tc>
+                <a:tc>
+                  <a:txBody>
+                    <a:bodyPr/>
+                    <a:lstStyle/>
+                    <a:p>
+                      <a:pPr lvl="0" indent="0" marL="0">
+                        <a:buNone/>
+                      </a:pPr>
+                      <a:r>
+                        <a:rPr/>
+                        <a:t>Phase 5 — Data Governance Substrate</a:t>
+                      </a:r>
+                    </a:p>
+                  </a:txBody>
+                </a:tc>
+              </a:tr>
+              <a:tr h="0">
+                <a:tc>
+                  <a:txBody>
+                    <a:bodyPr/>
+                    <a:lstStyle/>
+                    <a:p>
+                      <a:pPr lvl="0" indent="0" marL="0">
+                        <a:buNone/>
+                      </a:pPr>
+                      <a:r>
+                        <a:rPr>
+                          <a:latin typeface="Courier"/>
+                        </a:rPr>
+                        <a:t>16_DriftDetectionStandard.md</a:t>
+                      </a:r>
+                    </a:p>
+                  </a:txBody>
+                </a:tc>
+                <a:tc>
+                  <a:txBody>
+                    <a:bodyPr/>
+                    <a:lstStyle/>
+                    <a:p>
+                      <a:pPr lvl="0" indent="0" marL="0">
+                        <a:buNone/>
+                      </a:pPr>
+                      <a:r>
+                        <a:rPr/>
+                        <a:t>Drift to CM-3/SI-7/CA-7/IR-6</a:t>
+                      </a:r>
+                    </a:p>
+                  </a:txBody>
+                </a:tc>
+                <a:tc>
+                  <a:txBody>
+                    <a:bodyPr/>
+                    <a:lstStyle/>
+                    <a:p>
+                      <a:pPr lvl="0" indent="0" marL="0">
+                        <a:buNone/>
+                      </a:pPr>
+                      <a:r>
+                        <a:rPr/>
+                        <a:t>Phase 5 — Data Governance Substrate</a:t>
+                      </a:r>
+                    </a:p>
+                  </a:txBody>
+                </a:tc>
+              </a:tr>
+              <a:tr h="0">
+                <a:tc>
+                  <a:txBody>
+                    <a:bodyPr/>
+                    <a:lstStyle/>
+                    <a:p>
+                      <a:pPr lvl="0" indent="0" marL="0">
+                        <a:buNone/>
+                      </a:pPr>
+                      <a:r>
+                        <a:rPr>
+                          <a:latin typeface="Courier"/>
+                        </a:rPr>
+                        <a:t>17_ConsentEnvelope.md</a:t>
+                      </a:r>
+                    </a:p>
+                  </a:txBody>
+                </a:tc>
+                <a:tc>
+                  <a:txBody>
+                    <a:bodyPr/>
+                    <a:lstStyle/>
+                    <a:p>
+                      <a:pPr lvl="0" indent="0" marL="0">
+                        <a:buNone/>
+                      </a:pPr>
+                      <a:r>
+                        <a:rPr/>
+                        <a:t>Consent to AC-4/AC-22/AR-4/IP-1</a:t>
+                      </a:r>
+                    </a:p>
+                  </a:txBody>
+                </a:tc>
+                <a:tc>
+                  <a:txBody>
+                    <a:bodyPr/>
+                    <a:lstStyle/>
+                    <a:p>
+                      <a:pPr lvl="0" indent="0" marL="0">
+                        <a:buNone/>
+                      </a:pPr>
+                      <a:r>
+                        <a:rPr/>
+                        <a:t>Phase 5 — Data Governance Substrate</a:t>
+                      </a:r>
+                    </a:p>
+                  </a:txBody>
+                </a:tc>
+              </a:tr>
+              <a:tr h="0">
+                <a:tc>
+                  <a:txBody>
+                    <a:bodyPr/>
+                    <a:lstStyle/>
+                    <a:p>
+                      <a:pPr lvl="0" indent="0" marL="0">
+                        <a:buNone/>
+                      </a:pPr>
+                      <a:r>
+                        <a:rPr>
+                          <a:latin typeface="Courier"/>
+                        </a:rPr>
+                        <a:t>18_ClaimCatalog.md</a:t>
+                      </a:r>
+                    </a:p>
+                  </a:txBody>
+                </a:tc>
+                <a:tc>
+                  <a:txBody>
+                    <a:bodyPr/>
+                    <a:lstStyle/>
+                    <a:p>
+                      <a:pPr lvl="0" indent="0" marL="0">
+                        <a:buNone/>
+                      </a:pPr>
+                      <a:r>
+                        <a:rPr/>
+                        <a:t>Claims to CM-8/SA-4/SI-12</a:t>
+                      </a:r>
+                    </a:p>
+                  </a:txBody>
+                </a:tc>
+                <a:tc>
+                  <a:txBody>
+                    <a:bodyPr/>
+                    <a:lstStyle/>
+                    <a:p>
+                      <a:pPr lvl="0" indent="0" marL="0">
+                        <a:buNone/>
+                      </a:pPr>
+                      <a:r>
+                        <a:rPr/>
+                        <a:t>Phase 5 — Data Governance Substrate</a:t>
+                      </a:r>
+                    </a:p>
+                  </a:txBody>
+                </a:tc>
+              </a:tr>
+              <a:tr h="0">
+                <a:tc>
+                  <a:txBody>
+                    <a:bodyPr/>
+                    <a:lstStyle/>
+                    <a:p>
+                      <a:pPr lvl="0" indent="0" marL="0">
+                        <a:buNone/>
+                      </a:pPr>
+                      <a:r>
+                        <a:rPr>
+                          <a:latin typeface="Courier"/>
+                        </a:rPr>
+                        <a:t>19_ReconciliationModel.md</a:t>
+                      </a:r>
+                    </a:p>
+                  </a:txBody>
+                </a:tc>
+                <a:tc>
+                  <a:txBody>
+                    <a:bodyPr/>
+                    <a:lstStyle/>
+                    <a:p>
+                      <a:pPr lvl="0" indent="0" marL="0">
+                        <a:buNone/>
+                      </a:pPr>
+                      <a:r>
+                        <a:rPr/>
+                        <a:t>Reconciliation to AU-3/IR-4/SA-9/PM-16</a:t>
+                      </a:r>
+                    </a:p>
+                  </a:txBody>
+                </a:tc>
+                <a:tc>
+                  <a:txBody>
+                    <a:bodyPr/>
+                    <a:lstStyle/>
+                    <a:p>
+                      <a:pPr lvl="0" indent="0" marL="0">
+                        <a:buNone/>
+                      </a:pPr>
+                      <a:r>
+                        <a:rPr/>
+                        <a:t>Phase 5 — Data Governance Substrate</a:t>
                       </a:r>
                     </a:p>
                   </a:txBody>
